--- a/Logo3.pptx
+++ b/Logo3.pptx
@@ -104,6 +104,11 @@
       </a:defRPr>
     </a:lvl9pPr>
   </p:defaultTextStyle>
+  <p:extLst>
+    <p:ext uri="{EFAFB233-063F-42B5-8137-9DF3F51BA10A}">
+      <p15:sldGuideLst xmlns:p15="http://schemas.microsoft.com/office/powerpoint/2012/main"/>
+    </p:ext>
+  </p:extLst>
 </p:presentation>
 </file>
 
@@ -254,7 +259,7 @@
           <a:p>
             <a:fld id="{1EAB8722-396E-45C3-A093-33D3DA872A4C}" type="datetimeFigureOut">
               <a:rPr lang="de-DE" smtClean="0"/>
-              <a:t>06.04.2026</a:t>
+              <a:t>10.04.2026</a:t>
             </a:fld>
             <a:endParaRPr lang="de-DE"/>
           </a:p>
@@ -452,7 +457,7 @@
           <a:p>
             <a:fld id="{1EAB8722-396E-45C3-A093-33D3DA872A4C}" type="datetimeFigureOut">
               <a:rPr lang="de-DE" smtClean="0"/>
-              <a:t>06.04.2026</a:t>
+              <a:t>10.04.2026</a:t>
             </a:fld>
             <a:endParaRPr lang="de-DE"/>
           </a:p>
@@ -660,7 +665,7 @@
           <a:p>
             <a:fld id="{1EAB8722-396E-45C3-A093-33D3DA872A4C}" type="datetimeFigureOut">
               <a:rPr lang="de-DE" smtClean="0"/>
-              <a:t>06.04.2026</a:t>
+              <a:t>10.04.2026</a:t>
             </a:fld>
             <a:endParaRPr lang="de-DE"/>
           </a:p>
@@ -858,7 +863,7 @@
           <a:p>
             <a:fld id="{1EAB8722-396E-45C3-A093-33D3DA872A4C}" type="datetimeFigureOut">
               <a:rPr lang="de-DE" smtClean="0"/>
-              <a:t>06.04.2026</a:t>
+              <a:t>10.04.2026</a:t>
             </a:fld>
             <a:endParaRPr lang="de-DE"/>
           </a:p>
@@ -1133,7 +1138,7 @@
           <a:p>
             <a:fld id="{1EAB8722-396E-45C3-A093-33D3DA872A4C}" type="datetimeFigureOut">
               <a:rPr lang="de-DE" smtClean="0"/>
-              <a:t>06.04.2026</a:t>
+              <a:t>10.04.2026</a:t>
             </a:fld>
             <a:endParaRPr lang="de-DE"/>
           </a:p>
@@ -1398,7 +1403,7 @@
           <a:p>
             <a:fld id="{1EAB8722-396E-45C3-A093-33D3DA872A4C}" type="datetimeFigureOut">
               <a:rPr lang="de-DE" smtClean="0"/>
-              <a:t>06.04.2026</a:t>
+              <a:t>10.04.2026</a:t>
             </a:fld>
             <a:endParaRPr lang="de-DE"/>
           </a:p>
@@ -1810,7 +1815,7 @@
           <a:p>
             <a:fld id="{1EAB8722-396E-45C3-A093-33D3DA872A4C}" type="datetimeFigureOut">
               <a:rPr lang="de-DE" smtClean="0"/>
-              <a:t>06.04.2026</a:t>
+              <a:t>10.04.2026</a:t>
             </a:fld>
             <a:endParaRPr lang="de-DE"/>
           </a:p>
@@ -1951,7 +1956,7 @@
           <a:p>
             <a:fld id="{1EAB8722-396E-45C3-A093-33D3DA872A4C}" type="datetimeFigureOut">
               <a:rPr lang="de-DE" smtClean="0"/>
-              <a:t>06.04.2026</a:t>
+              <a:t>10.04.2026</a:t>
             </a:fld>
             <a:endParaRPr lang="de-DE"/>
           </a:p>
@@ -2064,7 +2069,7 @@
           <a:p>
             <a:fld id="{1EAB8722-396E-45C3-A093-33D3DA872A4C}" type="datetimeFigureOut">
               <a:rPr lang="de-DE" smtClean="0"/>
-              <a:t>06.04.2026</a:t>
+              <a:t>10.04.2026</a:t>
             </a:fld>
             <a:endParaRPr lang="de-DE"/>
           </a:p>
@@ -2375,7 +2380,7 @@
           <a:p>
             <a:fld id="{1EAB8722-396E-45C3-A093-33D3DA872A4C}" type="datetimeFigureOut">
               <a:rPr lang="de-DE" smtClean="0"/>
-              <a:t>06.04.2026</a:t>
+              <a:t>10.04.2026</a:t>
             </a:fld>
             <a:endParaRPr lang="de-DE"/>
           </a:p>
@@ -2663,7 +2668,7 @@
           <a:p>
             <a:fld id="{1EAB8722-396E-45C3-A093-33D3DA872A4C}" type="datetimeFigureOut">
               <a:rPr lang="de-DE" smtClean="0"/>
-              <a:t>06.04.2026</a:t>
+              <a:t>10.04.2026</a:t>
             </a:fld>
             <a:endParaRPr lang="de-DE"/>
           </a:p>
@@ -2904,7 +2909,7 @@
           <a:p>
             <a:fld id="{1EAB8722-396E-45C3-A093-33D3DA872A4C}" type="datetimeFigureOut">
               <a:rPr lang="de-DE" smtClean="0"/>
-              <a:t>06.04.2026</a:t>
+              <a:t>10.04.2026</a:t>
             </a:fld>
             <a:endParaRPr lang="de-DE"/>
           </a:p>
@@ -3373,141 +3378,162 @@
           </a:p>
         </p:txBody>
       </p:sp>
-      <p:pic>
-        <p:nvPicPr>
-          <p:cNvPr id="5" name="Grafik 4">
-            <a:extLst>
-              <a:ext uri="{FF2B5EF4-FFF2-40B4-BE49-F238E27FC236}">
-                <a16:creationId xmlns:a16="http://schemas.microsoft.com/office/drawing/2014/main" id="{57E3C92A-9214-6D8A-ADF0-9BFD88AC2460}"/>
-              </a:ext>
-            </a:extLst>
-          </p:cNvPr>
-          <p:cNvPicPr>
-            <a:picLocks noChangeAspect="1"/>
-          </p:cNvPicPr>
+      <p:grpSp>
+        <p:nvGrpSpPr>
+          <p:cNvPr id="3" name="Gruppieren 2">
+            <a:extLst>
+              <a:ext uri="{FF2B5EF4-FFF2-40B4-BE49-F238E27FC236}">
+                <a16:creationId xmlns:a16="http://schemas.microsoft.com/office/drawing/2014/main" id="{1ACC3E2E-42CF-6414-AC1B-BC519DB2FD01}"/>
+              </a:ext>
+            </a:extLst>
+          </p:cNvPr>
+          <p:cNvGrpSpPr/>
           <p:nvPr/>
-        </p:nvPicPr>
-        <p:blipFill>
-          <a:blip r:embed="rId2">
-            <a:extLst>
-              <a:ext uri="{28A0092B-C50C-407E-A947-70E740481C1C}">
-                <a14:useLocalDpi xmlns:a14="http://schemas.microsoft.com/office/drawing/2010/main" val="0"/>
-              </a:ext>
-            </a:extLst>
-          </a:blip>
-          <a:stretch>
-            <a:fillRect/>
-          </a:stretch>
-        </p:blipFill>
-        <p:spPr>
+        </p:nvGrpSpPr>
+        <p:grpSpPr>
           <a:xfrm>
             <a:off x="3183946" y="431221"/>
             <a:ext cx="5081158" cy="5081158"/>
+            <a:chOff x="3183946" y="431221"/>
+            <a:chExt cx="5081158" cy="5081158"/>
           </a:xfrm>
-          <a:prstGeom prst="ellipse">
-            <a:avLst/>
-          </a:prstGeom>
-        </p:spPr>
-      </p:pic>
-      <p:sp>
-        <p:nvSpPr>
-          <p:cNvPr id="6" name="Halbbogen 5">
-            <a:extLst>
-              <a:ext uri="{FF2B5EF4-FFF2-40B4-BE49-F238E27FC236}">
-                <a16:creationId xmlns:a16="http://schemas.microsoft.com/office/drawing/2014/main" id="{9B2BACC1-11AD-65E4-7826-0582EE2BB850}"/>
-              </a:ext>
-            </a:extLst>
-          </p:cNvPr>
-          <p:cNvSpPr/>
-          <p:nvPr/>
-        </p:nvSpPr>
-        <p:spPr>
-          <a:xfrm rot="10800000">
-            <a:off x="3712366" y="1995486"/>
-            <a:ext cx="3993358" cy="3133726"/>
-          </a:xfrm>
-          <a:prstGeom prst="blockArc">
-            <a:avLst>
-              <a:gd name="adj1" fmla="val 10741318"/>
-              <a:gd name="adj2" fmla="val 88769"/>
-              <a:gd name="adj3" fmla="val 16228"/>
-            </a:avLst>
-          </a:prstGeom>
-          <a:solidFill>
-            <a:srgbClr val="ECECEC"/>
-          </a:solidFill>
-          <a:ln>
+        </p:grpSpPr>
+        <p:pic>
+          <p:nvPicPr>
+            <p:cNvPr id="5" name="Grafik 4">
+              <a:extLst>
+                <a:ext uri="{FF2B5EF4-FFF2-40B4-BE49-F238E27FC236}">
+                  <a16:creationId xmlns:a16="http://schemas.microsoft.com/office/drawing/2014/main" id="{57E3C92A-9214-6D8A-ADF0-9BFD88AC2460}"/>
+                </a:ext>
+              </a:extLst>
+            </p:cNvPr>
+            <p:cNvPicPr>
+              <a:picLocks noChangeAspect="1"/>
+            </p:cNvPicPr>
+            <p:nvPr/>
+          </p:nvPicPr>
+          <p:blipFill>
+            <a:blip r:embed="rId2">
+              <a:extLst>
+                <a:ext uri="{28A0092B-C50C-407E-A947-70E740481C1C}">
+                  <a14:useLocalDpi xmlns:a14="http://schemas.microsoft.com/office/drawing/2010/main" val="0"/>
+                </a:ext>
+              </a:extLst>
+            </a:blip>
+            <a:stretch>
+              <a:fillRect/>
+            </a:stretch>
+          </p:blipFill>
+          <p:spPr>
+            <a:xfrm>
+              <a:off x="3183946" y="431221"/>
+              <a:ext cx="5081158" cy="5081158"/>
+            </a:xfrm>
+            <a:prstGeom prst="ellipse">
+              <a:avLst/>
+            </a:prstGeom>
+          </p:spPr>
+        </p:pic>
+        <p:sp>
+          <p:nvSpPr>
+            <p:cNvPr id="6" name="Halbbogen 5">
+              <a:extLst>
+                <a:ext uri="{FF2B5EF4-FFF2-40B4-BE49-F238E27FC236}">
+                  <a16:creationId xmlns:a16="http://schemas.microsoft.com/office/drawing/2014/main" id="{9B2BACC1-11AD-65E4-7826-0582EE2BB850}"/>
+                </a:ext>
+              </a:extLst>
+            </p:cNvPr>
+            <p:cNvSpPr/>
+            <p:nvPr/>
+          </p:nvSpPr>
+          <p:spPr>
+            <a:xfrm rot="10800000">
+              <a:off x="3712366" y="1995486"/>
+              <a:ext cx="3993358" cy="3133726"/>
+            </a:xfrm>
+            <a:prstGeom prst="blockArc">
+              <a:avLst>
+                <a:gd name="adj1" fmla="val 10741318"/>
+                <a:gd name="adj2" fmla="val 88769"/>
+                <a:gd name="adj3" fmla="val 16228"/>
+              </a:avLst>
+            </a:prstGeom>
+            <a:solidFill>
+              <a:srgbClr val="ECECEC"/>
+            </a:solidFill>
+            <a:ln>
+              <a:noFill/>
+            </a:ln>
+          </p:spPr>
+          <p:style>
+            <a:lnRef idx="2">
+              <a:schemeClr val="accent1">
+                <a:shade val="15000"/>
+              </a:schemeClr>
+            </a:lnRef>
+            <a:fillRef idx="1">
+              <a:schemeClr val="accent1"/>
+            </a:fillRef>
+            <a:effectRef idx="0">
+              <a:schemeClr val="accent1"/>
+            </a:effectRef>
+            <a:fontRef idx="minor">
+              <a:schemeClr val="lt1"/>
+            </a:fontRef>
+          </p:style>
+          <p:txBody>
+            <a:bodyPr rtlCol="0" anchor="ctr"/>
+            <a:lstStyle/>
+            <a:p>
+              <a:pPr algn="ctr"/>
+              <a:endParaRPr lang="de-DE" dirty="0"/>
+            </a:p>
+          </p:txBody>
+        </p:sp>
+        <p:sp>
+          <p:nvSpPr>
+            <p:cNvPr id="7" name="Textfeld 6">
+              <a:extLst>
+                <a:ext uri="{FF2B5EF4-FFF2-40B4-BE49-F238E27FC236}">
+                  <a16:creationId xmlns:a16="http://schemas.microsoft.com/office/drawing/2014/main" id="{41AD8C17-499B-0FAF-136C-16C7C0354D20}"/>
+                </a:ext>
+              </a:extLst>
+            </p:cNvPr>
+            <p:cNvSpPr txBox="1"/>
+            <p:nvPr/>
+          </p:nvSpPr>
+          <p:spPr>
+            <a:xfrm>
+              <a:off x="4289345" y="3825240"/>
+              <a:ext cx="2870359" cy="1074420"/>
+            </a:xfrm>
+            <a:prstGeom prst="rect">
+              <a:avLst/>
+            </a:prstGeom>
             <a:noFill/>
-          </a:ln>
-        </p:spPr>
-        <p:style>
-          <a:lnRef idx="2">
-            <a:schemeClr val="accent1">
-              <a:shade val="15000"/>
-            </a:schemeClr>
-          </a:lnRef>
-          <a:fillRef idx="1">
-            <a:schemeClr val="accent1"/>
-          </a:fillRef>
-          <a:effectRef idx="0">
-            <a:schemeClr val="accent1"/>
-          </a:effectRef>
-          <a:fontRef idx="minor">
-            <a:schemeClr val="lt1"/>
-          </a:fontRef>
-        </p:style>
-        <p:txBody>
-          <a:bodyPr rtlCol="0" anchor="ctr"/>
-          <a:lstStyle/>
-          <a:p>
-            <a:pPr algn="ctr"/>
-            <a:endParaRPr lang="de-DE" dirty="0"/>
-          </a:p>
-        </p:txBody>
-      </p:sp>
-      <p:sp>
-        <p:nvSpPr>
-          <p:cNvPr id="7" name="Textfeld 6">
-            <a:extLst>
-              <a:ext uri="{FF2B5EF4-FFF2-40B4-BE49-F238E27FC236}">
-                <a16:creationId xmlns:a16="http://schemas.microsoft.com/office/drawing/2014/main" id="{41AD8C17-499B-0FAF-136C-16C7C0354D20}"/>
-              </a:ext>
-            </a:extLst>
-          </p:cNvPr>
-          <p:cNvSpPr txBox="1"/>
-          <p:nvPr/>
-        </p:nvSpPr>
-        <p:spPr>
-          <a:xfrm>
-            <a:off x="4289345" y="3825240"/>
-            <a:ext cx="2870359" cy="1074420"/>
-          </a:xfrm>
-          <a:prstGeom prst="rect">
-            <a:avLst/>
-          </a:prstGeom>
-          <a:noFill/>
-        </p:spPr>
-        <p:txBody>
-          <a:bodyPr wrap="square" rtlCol="0">
-            <a:prstTxWarp prst="textArchDown">
-              <a:avLst>
-                <a:gd name="adj" fmla="val 21089092"/>
-              </a:avLst>
-            </a:prstTxWarp>
-            <a:spAutoFit/>
-          </a:bodyPr>
-          <a:lstStyle/>
-          <a:p>
-            <a:pPr algn="ctr"/>
-            <a:r>
-              <a:rPr lang="de-DE" sz="2800" b="1" spc="600" dirty="0">
-                <a:latin typeface="Monotype Corsiva" panose="03010101010201010101" pitchFamily="66" charset="0"/>
-              </a:rPr>
-              <a:t>CRESCENDO</a:t>
-            </a:r>
-          </a:p>
-        </p:txBody>
-      </p:sp>
+          </p:spPr>
+          <p:txBody>
+            <a:bodyPr wrap="square" rtlCol="0">
+              <a:prstTxWarp prst="textArchDown">
+                <a:avLst>
+                  <a:gd name="adj" fmla="val 21089092"/>
+                </a:avLst>
+              </a:prstTxWarp>
+              <a:spAutoFit/>
+            </a:bodyPr>
+            <a:lstStyle/>
+            <a:p>
+              <a:pPr algn="ctr"/>
+              <a:r>
+                <a:rPr lang="de-DE" sz="2800" b="1" spc="600" dirty="0">
+                  <a:latin typeface="Monotype Corsiva" panose="03010101010201010101" pitchFamily="66" charset="0"/>
+                </a:rPr>
+                <a:t>CRESCENDO</a:t>
+              </a:r>
+            </a:p>
+          </p:txBody>
+        </p:sp>
+      </p:grpSp>
     </p:spTree>
     <p:extLst>
       <p:ext uri="{BB962C8B-B14F-4D97-AF65-F5344CB8AC3E}">
